--- a/activity/M04A10/M04A10.pptx
+++ b/activity/M04A10/M04A10.pptx
@@ -417,7 +417,7 @@
             <a:fld id="{53CE91DE-ABC6-4D22-89A0-1765B629FB43}" type="datetimeFigureOut">
               <a:rPr lang="es-CO" smtClean="0"/>
               <a:pPr/>
-              <a:t>23/11/2021</a:t>
+              <a:t>21/11/2025</a:t>
             </a:fld>
             <a:endParaRPr lang="es-CO"/>
           </a:p>
@@ -2485,7 +2485,7 @@
             <a:fld id="{43DF08CB-A55A-40B1-AEFD-F19B3CFD19B5}" type="datetimeFigureOut">
               <a:rPr lang="es-CO" smtClean="0"/>
               <a:pPr/>
-              <a:t>23/11/2021</a:t>
+              <a:t>21/11/2025</a:t>
             </a:fld>
             <a:endParaRPr lang="es-CO"/>
           </a:p>
@@ -2652,7 +2652,7 @@
             <a:fld id="{43DF08CB-A55A-40B1-AEFD-F19B3CFD19B5}" type="datetimeFigureOut">
               <a:rPr lang="es-CO" smtClean="0"/>
               <a:pPr/>
-              <a:t>23/11/2021</a:t>
+              <a:t>21/11/2025</a:t>
             </a:fld>
             <a:endParaRPr lang="es-CO"/>
           </a:p>
@@ -2829,7 +2829,7 @@
             <a:fld id="{43DF08CB-A55A-40B1-AEFD-F19B3CFD19B5}" type="datetimeFigureOut">
               <a:rPr lang="es-CO" smtClean="0"/>
               <a:pPr/>
-              <a:t>23/11/2021</a:t>
+              <a:t>21/11/2025</a:t>
             </a:fld>
             <a:endParaRPr lang="es-CO"/>
           </a:p>
@@ -2996,7 +2996,7 @@
             <a:fld id="{43DF08CB-A55A-40B1-AEFD-F19B3CFD19B5}" type="datetimeFigureOut">
               <a:rPr lang="es-CO" smtClean="0"/>
               <a:pPr/>
-              <a:t>23/11/2021</a:t>
+              <a:t>21/11/2025</a:t>
             </a:fld>
             <a:endParaRPr lang="es-CO"/>
           </a:p>
@@ -3239,7 +3239,7 @@
             <a:fld id="{43DF08CB-A55A-40B1-AEFD-F19B3CFD19B5}" type="datetimeFigureOut">
               <a:rPr lang="es-CO" smtClean="0"/>
               <a:pPr/>
-              <a:t>23/11/2021</a:t>
+              <a:t>21/11/2025</a:t>
             </a:fld>
             <a:endParaRPr lang="es-CO"/>
           </a:p>
@@ -3524,7 +3524,7 @@
             <a:fld id="{43DF08CB-A55A-40B1-AEFD-F19B3CFD19B5}" type="datetimeFigureOut">
               <a:rPr lang="es-CO" smtClean="0"/>
               <a:pPr/>
-              <a:t>23/11/2021</a:t>
+              <a:t>21/11/2025</a:t>
             </a:fld>
             <a:endParaRPr lang="es-CO"/>
           </a:p>
@@ -3943,7 +3943,7 @@
             <a:fld id="{43DF08CB-A55A-40B1-AEFD-F19B3CFD19B5}" type="datetimeFigureOut">
               <a:rPr lang="es-CO" smtClean="0"/>
               <a:pPr/>
-              <a:t>23/11/2021</a:t>
+              <a:t>21/11/2025</a:t>
             </a:fld>
             <a:endParaRPr lang="es-CO"/>
           </a:p>
@@ -4058,7 +4058,7 @@
             <a:fld id="{43DF08CB-A55A-40B1-AEFD-F19B3CFD19B5}" type="datetimeFigureOut">
               <a:rPr lang="es-CO" smtClean="0"/>
               <a:pPr/>
-              <a:t>23/11/2021</a:t>
+              <a:t>21/11/2025</a:t>
             </a:fld>
             <a:endParaRPr lang="es-CO"/>
           </a:p>
@@ -4150,7 +4150,7 @@
             <a:fld id="{43DF08CB-A55A-40B1-AEFD-F19B3CFD19B5}" type="datetimeFigureOut">
               <a:rPr lang="es-CO" smtClean="0"/>
               <a:pPr/>
-              <a:t>23/11/2021</a:t>
+              <a:t>21/11/2025</a:t>
             </a:fld>
             <a:endParaRPr lang="es-CO"/>
           </a:p>
@@ -4424,7 +4424,7 @@
             <a:fld id="{43DF08CB-A55A-40B1-AEFD-F19B3CFD19B5}" type="datetimeFigureOut">
               <a:rPr lang="es-CO" smtClean="0"/>
               <a:pPr/>
-              <a:t>23/11/2021</a:t>
+              <a:t>21/11/2025</a:t>
             </a:fld>
             <a:endParaRPr lang="es-CO"/>
           </a:p>
@@ -4674,7 +4674,7 @@
             <a:fld id="{43DF08CB-A55A-40B1-AEFD-F19B3CFD19B5}" type="datetimeFigureOut">
               <a:rPr lang="es-CO" smtClean="0"/>
               <a:pPr/>
-              <a:t>23/11/2021</a:t>
+              <a:t>21/11/2025</a:t>
             </a:fld>
             <a:endParaRPr lang="es-CO"/>
           </a:p>
@@ -4887,7 +4887,7 @@
             <a:fld id="{43DF08CB-A55A-40B1-AEFD-F19B3CFD19B5}" type="datetimeFigureOut">
               <a:rPr lang="es-CO" smtClean="0"/>
               <a:pPr/>
-              <a:t>23/11/2021</a:t>
+              <a:t>21/11/2025</a:t>
             </a:fld>
             <a:endParaRPr lang="es-CO"/>
           </a:p>
